--- a/AI_Transit_Pipeline_Slides.pptx
+++ b/AI_Transit_Pipeline_Slides.pptx
@@ -20,6 +20,7 @@
     <p:sldId id="268" r:id="rId19"/>
     <p:sldId id="269" r:id="rId20"/>
     <p:sldId id="270" r:id="rId21"/>
+    <p:sldId id="271" r:id="rId22"/>
   </p:sldIdLst>
   <p:sldSz cx="12188952" cy="6858000" type="screen4x3"/>
   <p:notesSz cx="6858000" cy="9144000"/>
@@ -13782,6 +13783,1138 @@
         <p:spPr>
           <a:xfrm>
             <a:off x="0" y="0"/>
+            <a:ext cx="12188952" cy="914400"/>
+          </a:xfrm>
+          <a:prstGeom prst="rect">
+            <a:avLst/>
+          </a:prstGeom>
+          <a:solidFill>
+            <a:srgbClr val="0070A8"/>
+          </a:solidFill>
+          <a:ln>
+            <a:noFill/>
+          </a:ln>
+        </p:spPr>
+        <p:style>
+          <a:lnRef idx="1">
+            <a:schemeClr val="accent1"/>
+          </a:lnRef>
+          <a:fillRef idx="3">
+            <a:schemeClr val="accent1"/>
+          </a:fillRef>
+          <a:effectRef idx="2">
+            <a:schemeClr val="accent1"/>
+          </a:effectRef>
+          <a:fontRef idx="minor">
+            <a:schemeClr val="lt1"/>
+          </a:fontRef>
+        </p:style>
+        <p:txBody>
+          <a:bodyPr rtlCol="0" anchor="ctr"/>
+          <a:lstStyle/>
+          <a:p>
+            <a:pPr algn="ctr"/>
+          </a:p>
+        </p:txBody>
+      </p:sp>
+      <p:sp>
+        <p:nvSpPr>
+          <p:cNvPr id="3" name="TextBox 2"/>
+          <p:cNvSpPr txBox="1"/>
+          <p:nvPr/>
+        </p:nvSpPr>
+        <p:spPr>
+          <a:xfrm>
+            <a:off x="457200" y="109728"/>
+            <a:ext cx="12188952" cy="731520"/>
+          </a:xfrm>
+          <a:prstGeom prst="rect">
+            <a:avLst/>
+          </a:prstGeom>
+          <a:noFill/>
+        </p:spPr>
+        <p:txBody>
+          <a:bodyPr wrap="square">
+            <a:spAutoFit/>
+          </a:bodyPr>
+          <a:lstStyle/>
+          <a:p>
+            <a:pPr algn="l"/>
+            <a:r>
+              <a:rPr sz="3000" b="1" i="0">
+                <a:solidFill>
+                  <a:srgbClr val="FFFFFF"/>
+                </a:solidFill>
+                <a:latin typeface="Calibri"/>
+              </a:rPr>
+              <a:t>09  Exploitation &amp; assurance qualité</a:t>
+            </a:r>
+          </a:p>
+        </p:txBody>
+      </p:sp>
+      <p:sp>
+        <p:nvSpPr>
+          <p:cNvPr id="4" name="Rectangle 3"/>
+          <p:cNvSpPr/>
+          <p:nvPr/>
+        </p:nvSpPr>
+        <p:spPr>
+          <a:xfrm>
+            <a:off x="457200" y="960120"/>
+            <a:ext cx="11274552" cy="25400"/>
+          </a:xfrm>
+          <a:prstGeom prst="rect">
+            <a:avLst/>
+          </a:prstGeom>
+          <a:solidFill>
+            <a:srgbClr val="00A8FF"/>
+          </a:solidFill>
+          <a:ln>
+            <a:noFill/>
+          </a:ln>
+        </p:spPr>
+        <p:style>
+          <a:lnRef idx="1">
+            <a:schemeClr val="accent1"/>
+          </a:lnRef>
+          <a:fillRef idx="3">
+            <a:schemeClr val="accent1"/>
+          </a:fillRef>
+          <a:effectRef idx="2">
+            <a:schemeClr val="accent1"/>
+          </a:effectRef>
+          <a:fontRef idx="minor">
+            <a:schemeClr val="lt1"/>
+          </a:fontRef>
+        </p:style>
+        <p:txBody>
+          <a:bodyPr rtlCol="0" anchor="ctr"/>
+          <a:lstStyle/>
+          <a:p>
+            <a:pPr algn="ctr"/>
+          </a:p>
+        </p:txBody>
+      </p:sp>
+      <p:sp>
+        <p:nvSpPr>
+          <p:cNvPr id="5" name="TextBox 4"/>
+          <p:cNvSpPr txBox="1"/>
+          <p:nvPr/>
+        </p:nvSpPr>
+        <p:spPr>
+          <a:xfrm>
+            <a:off x="457200" y="1097280"/>
+            <a:ext cx="5486400" cy="457200"/>
+          </a:xfrm>
+          <a:prstGeom prst="rect">
+            <a:avLst/>
+          </a:prstGeom>
+          <a:noFill/>
+        </p:spPr>
+        <p:txBody>
+          <a:bodyPr wrap="square">
+            <a:spAutoFit/>
+          </a:bodyPr>
+          <a:lstStyle/>
+          <a:p>
+            <a:pPr algn="l"/>
+            <a:r>
+              <a:rPr sz="1900" b="1" i="0">
+                <a:solidFill>
+                  <a:srgbClr val="00A8FF"/>
+                </a:solidFill>
+                <a:latin typeface="Calibri"/>
+              </a:rPr>
+              <a:t>Options d'exécution</a:t>
+            </a:r>
+          </a:p>
+        </p:txBody>
+      </p:sp>
+      <p:sp>
+        <p:nvSpPr>
+          <p:cNvPr id="6" name="Rounded Rectangle 5"/>
+          <p:cNvSpPr/>
+          <p:nvPr/>
+        </p:nvSpPr>
+        <p:spPr>
+          <a:xfrm>
+            <a:off x="457200" y="1600200"/>
+            <a:ext cx="5394960" cy="2834640"/>
+          </a:xfrm>
+          <a:prstGeom prst="roundRect">
+            <a:avLst>
+              <a:gd name="adj" fmla="val 5000"/>
+            </a:avLst>
+          </a:prstGeom>
+          <a:solidFill>
+            <a:srgbClr val="1B2A3B"/>
+          </a:solidFill>
+          <a:ln>
+            <a:noFill/>
+          </a:ln>
+        </p:spPr>
+        <p:style>
+          <a:lnRef idx="1">
+            <a:schemeClr val="accent1"/>
+          </a:lnRef>
+          <a:fillRef idx="3">
+            <a:schemeClr val="accent1"/>
+          </a:fillRef>
+          <a:effectRef idx="2">
+            <a:schemeClr val="accent1"/>
+          </a:effectRef>
+          <a:fontRef idx="minor">
+            <a:schemeClr val="lt1"/>
+          </a:fontRef>
+        </p:style>
+        <p:txBody>
+          <a:bodyPr rtlCol="0" anchor="ctr"/>
+          <a:lstStyle/>
+          <a:p>
+            <a:pPr algn="ctr"/>
+          </a:p>
+        </p:txBody>
+      </p:sp>
+      <p:sp>
+        <p:nvSpPr>
+          <p:cNvPr id="7" name="TextBox 6"/>
+          <p:cNvSpPr txBox="1"/>
+          <p:nvPr/>
+        </p:nvSpPr>
+        <p:spPr>
+          <a:xfrm>
+            <a:off x="658368" y="1783080"/>
+            <a:ext cx="2377440" cy="274320"/>
+          </a:xfrm>
+          <a:prstGeom prst="rect">
+            <a:avLst/>
+          </a:prstGeom>
+          <a:noFill/>
+        </p:spPr>
+        <p:txBody>
+          <a:bodyPr wrap="square">
+            <a:spAutoFit/>
+          </a:bodyPr>
+          <a:lstStyle/>
+          <a:p>
+            <a:pPr algn="l"/>
+            <a:r>
+              <a:rPr sz="1200" b="1" i="0">
+                <a:solidFill>
+                  <a:srgbClr val="00D4AA"/>
+                </a:solidFill>
+                <a:latin typeface="Calibri"/>
+              </a:rPr>
+              <a:t>--quiet / --verbose</a:t>
+            </a:r>
+          </a:p>
+        </p:txBody>
+      </p:sp>
+      <p:sp>
+        <p:nvSpPr>
+          <p:cNvPr id="8" name="TextBox 7"/>
+          <p:cNvSpPr txBox="1"/>
+          <p:nvPr/>
+        </p:nvSpPr>
+        <p:spPr>
+          <a:xfrm>
+            <a:off x="658368" y="2011680"/>
+            <a:ext cx="4937760" cy="274320"/>
+          </a:xfrm>
+          <a:prstGeom prst="rect">
+            <a:avLst/>
+          </a:prstGeom>
+          <a:noFill/>
+        </p:spPr>
+        <p:txBody>
+          <a:bodyPr wrap="square">
+            <a:spAutoFit/>
+          </a:bodyPr>
+          <a:lstStyle/>
+          <a:p>
+            <a:pPr algn="l"/>
+            <a:r>
+              <a:rPr sz="1100" b="0" i="0">
+                <a:solidFill>
+                  <a:srgbClr val="8899AA"/>
+                </a:solidFill>
+                <a:latin typeface="Calibri"/>
+              </a:rPr>
+              <a:t>Verbosité des journaux</a:t>
+            </a:r>
+          </a:p>
+        </p:txBody>
+      </p:sp>
+      <p:sp>
+        <p:nvSpPr>
+          <p:cNvPr id="9" name="TextBox 8"/>
+          <p:cNvSpPr txBox="1"/>
+          <p:nvPr/>
+        </p:nvSpPr>
+        <p:spPr>
+          <a:xfrm>
+            <a:off x="658368" y="2313432"/>
+            <a:ext cx="2377440" cy="274320"/>
+          </a:xfrm>
+          <a:prstGeom prst="rect">
+            <a:avLst/>
+          </a:prstGeom>
+          <a:noFill/>
+        </p:spPr>
+        <p:txBody>
+          <a:bodyPr wrap="square">
+            <a:spAutoFit/>
+          </a:bodyPr>
+          <a:lstStyle/>
+          <a:p>
+            <a:pPr algn="l"/>
+            <a:r>
+              <a:rPr sz="1200" b="1" i="0">
+                <a:solidFill>
+                  <a:srgbClr val="00D4AA"/>
+                </a:solidFill>
+                <a:latin typeface="Calibri"/>
+              </a:rPr>
+              <a:t>--min-severity</a:t>
+            </a:r>
+          </a:p>
+        </p:txBody>
+      </p:sp>
+      <p:sp>
+        <p:nvSpPr>
+          <p:cNvPr id="10" name="TextBox 9"/>
+          <p:cNvSpPr txBox="1"/>
+          <p:nvPr/>
+        </p:nvSpPr>
+        <p:spPr>
+          <a:xfrm>
+            <a:off x="658368" y="2542032"/>
+            <a:ext cx="4937760" cy="274320"/>
+          </a:xfrm>
+          <a:prstGeom prst="rect">
+            <a:avLst/>
+          </a:prstGeom>
+          <a:noFill/>
+        </p:spPr>
+        <p:txBody>
+          <a:bodyPr wrap="square">
+            <a:spAutoFit/>
+          </a:bodyPr>
+          <a:lstStyle/>
+          <a:p>
+            <a:pPr algn="l"/>
+            <a:r>
+              <a:rPr sz="1100" b="0" i="0">
+                <a:solidFill>
+                  <a:srgbClr val="8899AA"/>
+                </a:solidFill>
+                <a:latin typeface="Calibri"/>
+              </a:rPr>
+              <a:t>Seuil de blocage : low → critical</a:t>
+            </a:r>
+          </a:p>
+        </p:txBody>
+      </p:sp>
+      <p:sp>
+        <p:nvSpPr>
+          <p:cNvPr id="11" name="TextBox 10"/>
+          <p:cNvSpPr txBox="1"/>
+          <p:nvPr/>
+        </p:nvSpPr>
+        <p:spPr>
+          <a:xfrm>
+            <a:off x="658368" y="2843784"/>
+            <a:ext cx="2377440" cy="274320"/>
+          </a:xfrm>
+          <a:prstGeom prst="rect">
+            <a:avLst/>
+          </a:prstGeom>
+          <a:noFill/>
+        </p:spPr>
+        <p:txBody>
+          <a:bodyPr wrap="square">
+            <a:spAutoFit/>
+          </a:bodyPr>
+          <a:lstStyle/>
+          <a:p>
+            <a:pPr algn="l"/>
+            <a:r>
+              <a:rPr sz="1200" b="1" i="0">
+                <a:solidFill>
+                  <a:srgbClr val="00D4AA"/>
+                </a:solidFill>
+                <a:latin typeface="Calibri"/>
+              </a:rPr>
+              <a:t>--since COMMIT</a:t>
+            </a:r>
+          </a:p>
+        </p:txBody>
+      </p:sp>
+      <p:sp>
+        <p:nvSpPr>
+          <p:cNvPr id="12" name="TextBox 11"/>
+          <p:cNvSpPr txBox="1"/>
+          <p:nvPr/>
+        </p:nvSpPr>
+        <p:spPr>
+          <a:xfrm>
+            <a:off x="658368" y="3072384"/>
+            <a:ext cx="4937760" cy="274320"/>
+          </a:xfrm>
+          <a:prstGeom prst="rect">
+            <a:avLst/>
+          </a:prstGeom>
+          <a:noFill/>
+        </p:spPr>
+        <p:txBody>
+          <a:bodyPr wrap="square">
+            <a:spAutoFit/>
+          </a:bodyPr>
+          <a:lstStyle/>
+          <a:p>
+            <a:pPr algn="l"/>
+            <a:r>
+              <a:rPr sz="1100" b="0" i="0">
+                <a:solidFill>
+                  <a:srgbClr val="8899AA"/>
+                </a:solidFill>
+                <a:latin typeface="Calibri"/>
+              </a:rPr>
+              <a:t>Uniquement les fichiers modifiés</a:t>
+            </a:r>
+          </a:p>
+        </p:txBody>
+      </p:sp>
+      <p:sp>
+        <p:nvSpPr>
+          <p:cNvPr id="13" name="TextBox 12"/>
+          <p:cNvSpPr txBox="1"/>
+          <p:nvPr/>
+        </p:nvSpPr>
+        <p:spPr>
+          <a:xfrm>
+            <a:off x="658368" y="3374135"/>
+            <a:ext cx="2377440" cy="274320"/>
+          </a:xfrm>
+          <a:prstGeom prst="rect">
+            <a:avLst/>
+          </a:prstGeom>
+          <a:noFill/>
+        </p:spPr>
+        <p:txBody>
+          <a:bodyPr wrap="square">
+            <a:spAutoFit/>
+          </a:bodyPr>
+          <a:lstStyle/>
+          <a:p>
+            <a:pPr algn="l"/>
+            <a:r>
+              <a:rPr sz="1200" b="1" i="0">
+                <a:solidFill>
+                  <a:srgbClr val="00D4AA"/>
+                </a:solidFill>
+                <a:latin typeface="Calibri"/>
+              </a:rPr>
+              <a:t>--report-only</a:t>
+            </a:r>
+          </a:p>
+        </p:txBody>
+      </p:sp>
+      <p:sp>
+        <p:nvSpPr>
+          <p:cNvPr id="14" name="TextBox 13"/>
+          <p:cNvSpPr txBox="1"/>
+          <p:nvPr/>
+        </p:nvSpPr>
+        <p:spPr>
+          <a:xfrm>
+            <a:off x="658368" y="3602735"/>
+            <a:ext cx="4937760" cy="274320"/>
+          </a:xfrm>
+          <a:prstGeom prst="rect">
+            <a:avLst/>
+          </a:prstGeom>
+          <a:noFill/>
+        </p:spPr>
+        <p:txBody>
+          <a:bodyPr wrap="square">
+            <a:spAutoFit/>
+          </a:bodyPr>
+          <a:lstStyle/>
+          <a:p>
+            <a:pPr algn="l"/>
+            <a:r>
+              <a:rPr sz="1100" b="0" i="0">
+                <a:solidFill>
+                  <a:srgbClr val="8899AA"/>
+                </a:solidFill>
+                <a:latin typeface="Calibri"/>
+              </a:rPr>
+              <a:t>Ne bloque jamais, ne met rien en quarantaine</a:t>
+            </a:r>
+          </a:p>
+        </p:txBody>
+      </p:sp>
+      <p:sp>
+        <p:nvSpPr>
+          <p:cNvPr id="15" name="TextBox 14"/>
+          <p:cNvSpPr txBox="1"/>
+          <p:nvPr/>
+        </p:nvSpPr>
+        <p:spPr>
+          <a:xfrm>
+            <a:off x="658368" y="3904487"/>
+            <a:ext cx="2377440" cy="274320"/>
+          </a:xfrm>
+          <a:prstGeom prst="rect">
+            <a:avLst/>
+          </a:prstGeom>
+          <a:noFill/>
+        </p:spPr>
+        <p:txBody>
+          <a:bodyPr wrap="square">
+            <a:spAutoFit/>
+          </a:bodyPr>
+          <a:lstStyle/>
+          <a:p>
+            <a:pPr algn="l"/>
+            <a:r>
+              <a:rPr sz="1200" b="1" i="0">
+                <a:solidFill>
+                  <a:srgbClr val="00D4AA"/>
+                </a:solidFill>
+                <a:latin typeface="Calibri"/>
+              </a:rPr>
+              <a:t>--no-zip / --no-excel</a:t>
+            </a:r>
+          </a:p>
+        </p:txBody>
+      </p:sp>
+      <p:sp>
+        <p:nvSpPr>
+          <p:cNvPr id="16" name="TextBox 15"/>
+          <p:cNvSpPr txBox="1"/>
+          <p:nvPr/>
+        </p:nvSpPr>
+        <p:spPr>
+          <a:xfrm>
+            <a:off x="658368" y="4133087"/>
+            <a:ext cx="4937760" cy="274320"/>
+          </a:xfrm>
+          <a:prstGeom prst="rect">
+            <a:avLst/>
+          </a:prstGeom>
+          <a:noFill/>
+        </p:spPr>
+        <p:txBody>
+          <a:bodyPr wrap="square">
+            <a:spAutoFit/>
+          </a:bodyPr>
+          <a:lstStyle/>
+          <a:p>
+            <a:pPr algn="l"/>
+            <a:r>
+              <a:rPr sz="1100" b="0" i="0">
+                <a:solidFill>
+                  <a:srgbClr val="8899AA"/>
+                </a:solidFill>
+                <a:latin typeface="Calibri"/>
+              </a:rPr>
+              <a:t>Rapports seuls, sans archive</a:t>
+            </a:r>
+          </a:p>
+        </p:txBody>
+      </p:sp>
+      <p:sp>
+        <p:nvSpPr>
+          <p:cNvPr id="17" name="TextBox 16"/>
+          <p:cNvSpPr txBox="1"/>
+          <p:nvPr/>
+        </p:nvSpPr>
+        <p:spPr>
+          <a:xfrm>
+            <a:off x="6309360" y="1097280"/>
+            <a:ext cx="5486400" cy="457200"/>
+          </a:xfrm>
+          <a:prstGeom prst="rect">
+            <a:avLst/>
+          </a:prstGeom>
+          <a:noFill/>
+        </p:spPr>
+        <p:txBody>
+          <a:bodyPr wrap="square">
+            <a:spAutoFit/>
+          </a:bodyPr>
+          <a:lstStyle/>
+          <a:p>
+            <a:pPr algn="l"/>
+            <a:r>
+              <a:rPr sz="1900" b="1" i="0">
+                <a:solidFill>
+                  <a:srgbClr val="2ECC71"/>
+                </a:solidFill>
+                <a:latin typeface="Calibri"/>
+              </a:rPr>
+              <a:t>Le pipeline se vérifie lui-même</a:t>
+            </a:r>
+          </a:p>
+        </p:txBody>
+      </p:sp>
+      <p:sp>
+        <p:nvSpPr>
+          <p:cNvPr id="18" name="Rounded Rectangle 17"/>
+          <p:cNvSpPr/>
+          <p:nvPr/>
+        </p:nvSpPr>
+        <p:spPr>
+          <a:xfrm>
+            <a:off x="6309360" y="1600200"/>
+            <a:ext cx="5394960" cy="2834640"/>
+          </a:xfrm>
+          <a:prstGeom prst="roundRect">
+            <a:avLst>
+              <a:gd name="adj" fmla="val 5000"/>
+            </a:avLst>
+          </a:prstGeom>
+          <a:solidFill>
+            <a:srgbClr val="1B2A3B"/>
+          </a:solidFill>
+          <a:ln>
+            <a:noFill/>
+          </a:ln>
+        </p:spPr>
+        <p:style>
+          <a:lnRef idx="1">
+            <a:schemeClr val="accent1"/>
+          </a:lnRef>
+          <a:fillRef idx="3">
+            <a:schemeClr val="accent1"/>
+          </a:fillRef>
+          <a:effectRef idx="2">
+            <a:schemeClr val="accent1"/>
+          </a:effectRef>
+          <a:fontRef idx="minor">
+            <a:schemeClr val="lt1"/>
+          </a:fontRef>
+        </p:style>
+        <p:txBody>
+          <a:bodyPr rtlCol="0" anchor="ctr"/>
+          <a:lstStyle/>
+          <a:p>
+            <a:pPr algn="ctr"/>
+          </a:p>
+        </p:txBody>
+      </p:sp>
+      <p:sp>
+        <p:nvSpPr>
+          <p:cNvPr id="19" name="TextBox 18"/>
+          <p:cNvSpPr txBox="1"/>
+          <p:nvPr/>
+        </p:nvSpPr>
+        <p:spPr>
+          <a:xfrm>
+            <a:off x="6510528" y="1783080"/>
+            <a:ext cx="2743200" cy="274320"/>
+          </a:xfrm>
+          <a:prstGeom prst="rect">
+            <a:avLst/>
+          </a:prstGeom>
+          <a:noFill/>
+        </p:spPr>
+        <p:txBody>
+          <a:bodyPr wrap="square">
+            <a:spAutoFit/>
+          </a:bodyPr>
+          <a:lstStyle/>
+          <a:p>
+            <a:pPr algn="l"/>
+            <a:r>
+              <a:rPr sz="1200" b="1" i="0">
+                <a:solidFill>
+                  <a:srgbClr val="FFFFFF"/>
+                </a:solidFill>
+                <a:latin typeface="Calibri"/>
+              </a:rPr>
+              <a:t>Suite de tests</a:t>
+            </a:r>
+          </a:p>
+        </p:txBody>
+      </p:sp>
+      <p:sp>
+        <p:nvSpPr>
+          <p:cNvPr id="20" name="TextBox 19"/>
+          <p:cNvSpPr txBox="1"/>
+          <p:nvPr/>
+        </p:nvSpPr>
+        <p:spPr>
+          <a:xfrm>
+            <a:off x="6510528" y="2011680"/>
+            <a:ext cx="4937760" cy="274320"/>
+          </a:xfrm>
+          <a:prstGeom prst="rect">
+            <a:avLst/>
+          </a:prstGeom>
+          <a:noFill/>
+        </p:spPr>
+        <p:txBody>
+          <a:bodyPr wrap="square">
+            <a:spAutoFit/>
+          </a:bodyPr>
+          <a:lstStyle/>
+          <a:p>
+            <a:pPr algn="l"/>
+            <a:r>
+              <a:rPr sz="1100" b="0" i="0">
+                <a:solidFill>
+                  <a:srgbClr val="8899AA"/>
+                </a:solidFill>
+                <a:latin typeface="Calibri"/>
+              </a:rPr>
+              <a:t>51 assertions, aucun outil requis</a:t>
+            </a:r>
+          </a:p>
+        </p:txBody>
+      </p:sp>
+      <p:sp>
+        <p:nvSpPr>
+          <p:cNvPr id="21" name="TextBox 20"/>
+          <p:cNvSpPr txBox="1"/>
+          <p:nvPr/>
+        </p:nvSpPr>
+        <p:spPr>
+          <a:xfrm>
+            <a:off x="6510528" y="2313432"/>
+            <a:ext cx="2743200" cy="274320"/>
+          </a:xfrm>
+          <a:prstGeom prst="rect">
+            <a:avLst/>
+          </a:prstGeom>
+          <a:noFill/>
+        </p:spPr>
+        <p:txBody>
+          <a:bodyPr wrap="square">
+            <a:spAutoFit/>
+          </a:bodyPr>
+          <a:lstStyle/>
+          <a:p>
+            <a:pPr algn="l"/>
+            <a:r>
+              <a:rPr sz="1200" b="1" i="0">
+                <a:solidFill>
+                  <a:srgbClr val="FFFFFF"/>
+                </a:solidFill>
+                <a:latin typeface="Calibri"/>
+              </a:rPr>
+              <a:t>Corpus de règles</a:t>
+            </a:r>
+          </a:p>
+        </p:txBody>
+      </p:sp>
+      <p:sp>
+        <p:nvSpPr>
+          <p:cNvPr id="22" name="TextBox 21"/>
+          <p:cNvSpPr txBox="1"/>
+          <p:nvPr/>
+        </p:nvSpPr>
+        <p:spPr>
+          <a:xfrm>
+            <a:off x="6510528" y="2542032"/>
+            <a:ext cx="4937760" cy="274320"/>
+          </a:xfrm>
+          <a:prstGeom prst="rect">
+            <a:avLst/>
+          </a:prstGeom>
+          <a:noFill/>
+        </p:spPr>
+        <p:txBody>
+          <a:bodyPr wrap="square">
+            <a:spAutoFit/>
+          </a:bodyPr>
+          <a:lstStyle/>
+          <a:p>
+            <a:pPr algn="l"/>
+            <a:r>
+              <a:rPr sz="1100" b="0" i="0">
+                <a:solidFill>
+                  <a:srgbClr val="8899AA"/>
+                </a:solidFill>
+                <a:latin typeface="Calibri"/>
+              </a:rPr>
+              <a:t>chaque finding doit viser le bon fichier</a:t>
+            </a:r>
+          </a:p>
+        </p:txBody>
+      </p:sp>
+      <p:sp>
+        <p:nvSpPr>
+          <p:cNvPr id="23" name="TextBox 22"/>
+          <p:cNvSpPr txBox="1"/>
+          <p:nvPr/>
+        </p:nvSpPr>
+        <p:spPr>
+          <a:xfrm>
+            <a:off x="6510528" y="2843784"/>
+            <a:ext cx="2743200" cy="274320"/>
+          </a:xfrm>
+          <a:prstGeom prst="rect">
+            <a:avLst/>
+          </a:prstGeom>
+          <a:noFill/>
+        </p:spPr>
+        <p:txBody>
+          <a:bodyPr wrap="square">
+            <a:spAutoFit/>
+          </a:bodyPr>
+          <a:lstStyle/>
+          <a:p>
+            <a:pPr algn="l"/>
+            <a:r>
+              <a:rPr sz="1200" b="1" i="0">
+                <a:solidFill>
+                  <a:srgbClr val="FFFFFF"/>
+                </a:solidFill>
+                <a:latin typeface="Calibri"/>
+              </a:rPr>
+              <a:t>Garde-fous</a:t>
+            </a:r>
+          </a:p>
+        </p:txBody>
+      </p:sp>
+      <p:sp>
+        <p:nvSpPr>
+          <p:cNvPr id="24" name="TextBox 23"/>
+          <p:cNvSpPr txBox="1"/>
+          <p:nvPr/>
+        </p:nvSpPr>
+        <p:spPr>
+          <a:xfrm>
+            <a:off x="6510528" y="3072384"/>
+            <a:ext cx="4937760" cy="274320"/>
+          </a:xfrm>
+          <a:prstGeom prst="rect">
+            <a:avLst/>
+          </a:prstGeom>
+          <a:noFill/>
+        </p:spPr>
+        <p:txBody>
+          <a:bodyPr wrap="square">
+            <a:spAutoFit/>
+          </a:bodyPr>
+          <a:lstStyle/>
+          <a:p>
+            <a:pPr algn="l"/>
+            <a:r>
+              <a:rPr sz="1100" b="0" i="0">
+                <a:solidFill>
+                  <a:srgbClr val="8899AA"/>
+                </a:solidFill>
+                <a:latin typeface="Calibri"/>
+              </a:rPr>
+              <a:t>le code sûr ne doit jamais être signalé</a:t>
+            </a:r>
+          </a:p>
+        </p:txBody>
+      </p:sp>
+      <p:sp>
+        <p:nvSpPr>
+          <p:cNvPr id="25" name="TextBox 24"/>
+          <p:cNvSpPr txBox="1"/>
+          <p:nvPr/>
+        </p:nvSpPr>
+        <p:spPr>
+          <a:xfrm>
+            <a:off x="6510528" y="3374135"/>
+            <a:ext cx="2743200" cy="274320"/>
+          </a:xfrm>
+          <a:prstGeom prst="rect">
+            <a:avLst/>
+          </a:prstGeom>
+          <a:noFill/>
+        </p:spPr>
+        <p:txBody>
+          <a:bodyPr wrap="square">
+            <a:spAutoFit/>
+          </a:bodyPr>
+          <a:lstStyle/>
+          <a:p>
+            <a:pPr algn="l"/>
+            <a:r>
+              <a:rPr sz="1200" b="1" i="0">
+                <a:solidFill>
+                  <a:srgbClr val="FFFFFF"/>
+                </a:solidFill>
+                <a:latin typeface="Calibri"/>
+              </a:rPr>
+              <a:t>Intégration continue</a:t>
+            </a:r>
+          </a:p>
+        </p:txBody>
+      </p:sp>
+      <p:sp>
+        <p:nvSpPr>
+          <p:cNvPr id="26" name="TextBox 25"/>
+          <p:cNvSpPr txBox="1"/>
+          <p:nvPr/>
+        </p:nvSpPr>
+        <p:spPr>
+          <a:xfrm>
+            <a:off x="6510528" y="3602735"/>
+            <a:ext cx="4937760" cy="274320"/>
+          </a:xfrm>
+          <a:prstGeom prst="rect">
+            <a:avLst/>
+          </a:prstGeom>
+          <a:noFill/>
+        </p:spPr>
+        <p:txBody>
+          <a:bodyPr wrap="square">
+            <a:spAutoFit/>
+          </a:bodyPr>
+          <a:lstStyle/>
+          <a:p>
+            <a:pPr algn="l"/>
+            <a:r>
+              <a:rPr sz="1100" b="0" i="0">
+                <a:solidFill>
+                  <a:srgbClr val="8899AA"/>
+                </a:solidFill>
+                <a:latin typeface="Calibri"/>
+              </a:rPr>
+              <a:t>lint · test · pins · docker</a:t>
+            </a:r>
+          </a:p>
+        </p:txBody>
+      </p:sp>
+      <p:sp>
+        <p:nvSpPr>
+          <p:cNvPr id="27" name="TextBox 26"/>
+          <p:cNvSpPr txBox="1"/>
+          <p:nvPr/>
+        </p:nvSpPr>
+        <p:spPr>
+          <a:xfrm>
+            <a:off x="6510528" y="3904487"/>
+            <a:ext cx="2743200" cy="274320"/>
+          </a:xfrm>
+          <a:prstGeom prst="rect">
+            <a:avLst/>
+          </a:prstGeom>
+          <a:noFill/>
+        </p:spPr>
+        <p:txBody>
+          <a:bodyPr wrap="square">
+            <a:spAutoFit/>
+          </a:bodyPr>
+          <a:lstStyle/>
+          <a:p>
+            <a:pPr algn="l"/>
+            <a:r>
+              <a:rPr sz="1200" b="1" i="0">
+                <a:solidFill>
+                  <a:srgbClr val="FFFFFF"/>
+                </a:solidFill>
+                <a:latin typeface="Calibri"/>
+              </a:rPr>
+              <a:t>Validation par mutation</a:t>
+            </a:r>
+          </a:p>
+        </p:txBody>
+      </p:sp>
+      <p:sp>
+        <p:nvSpPr>
+          <p:cNvPr id="28" name="TextBox 27"/>
+          <p:cNvSpPr txBox="1"/>
+          <p:nvPr/>
+        </p:nvSpPr>
+        <p:spPr>
+          <a:xfrm>
+            <a:off x="6510528" y="4133087"/>
+            <a:ext cx="4937760" cy="274320"/>
+          </a:xfrm>
+          <a:prstGeom prst="rect">
+            <a:avLst/>
+          </a:prstGeom>
+          <a:noFill/>
+        </p:spPr>
+        <p:txBody>
+          <a:bodyPr wrap="square">
+            <a:spAutoFit/>
+          </a:bodyPr>
+          <a:lstStyle/>
+          <a:p>
+            <a:pPr algn="l"/>
+            <a:r>
+              <a:rPr sz="1100" b="0" i="0">
+                <a:solidFill>
+                  <a:srgbClr val="8899AA"/>
+                </a:solidFill>
+                <a:latin typeface="Calibri"/>
+              </a:rPr>
+              <a:t>le défaut est réintroduit, le test doit échouer</a:t>
+            </a:r>
+          </a:p>
+        </p:txBody>
+      </p:sp>
+      <p:sp>
+        <p:nvSpPr>
+          <p:cNvPr id="29" name="TextBox 28"/>
+          <p:cNvSpPr txBox="1"/>
+          <p:nvPr/>
+        </p:nvSpPr>
+        <p:spPr>
+          <a:xfrm>
+            <a:off x="457200" y="4572000"/>
+            <a:ext cx="5486400" cy="365760"/>
+          </a:xfrm>
+          <a:prstGeom prst="rect">
+            <a:avLst/>
+          </a:prstGeom>
+          <a:noFill/>
+        </p:spPr>
+        <p:txBody>
+          <a:bodyPr wrap="square">
+            <a:spAutoFit/>
+          </a:bodyPr>
+          <a:lstStyle/>
+          <a:p>
+            <a:pPr algn="l"/>
+            <a:r>
+              <a:rPr sz="1700" b="1" i="0">
+                <a:solidFill>
+                  <a:srgbClr val="00A8FF"/>
+                </a:solidFill>
+                <a:latin typeface="Calibri"/>
+              </a:rPr>
+              <a:t>Contrôles par dépôt</a:t>
+            </a:r>
+          </a:p>
+        </p:txBody>
+      </p:sp>
+      <p:sp>
+        <p:nvSpPr>
+          <p:cNvPr id="30" name="TextBox 29"/>
+          <p:cNvSpPr txBox="1"/>
+          <p:nvPr/>
+        </p:nvSpPr>
+        <p:spPr>
+          <a:xfrm>
+            <a:off x="457200" y="4983480"/>
+            <a:ext cx="11247120" cy="822960"/>
+          </a:xfrm>
+          <a:prstGeom prst="rect">
+            <a:avLst/>
+          </a:prstGeom>
+          <a:noFill/>
+        </p:spPr>
+        <p:txBody>
+          <a:bodyPr wrap="square">
+            <a:spAutoFit/>
+          </a:bodyPr>
+          <a:lstStyle/>
+          <a:p>
+            <a:pPr algn="l">
+              <a:spcAft>
+                <a:spcPts val="400"/>
+              </a:spcAft>
+            </a:pPr>
+            <a:r>
+              <a:rPr sz="1200" b="0">
+                <a:solidFill>
+                  <a:srgbClr val="8899AA"/>
+                </a:solidFill>
+                <a:latin typeface="Calibri"/>
+              </a:rPr>
+              <a:t>.transitignore  —  motifs gitignore, fichiers exclus de toutes les couches</a:t>
+            </a:r>
+          </a:p>
+          <a:p>
+            <a:pPr algn="l">
+              <a:spcAft>
+                <a:spcPts val="400"/>
+              </a:spcAft>
+            </a:pPr>
+            <a:r>
+              <a:rPr sz="1200" b="0">
+                <a:solidFill>
+                  <a:srgbClr val="8899AA"/>
+                </a:solidFill>
+                <a:latin typeface="Calibri"/>
+              </a:rPr>
+              <a:t>.transit-allow.json  —  rétrograde un FAIL connu en WARN, avec justification</a:t>
+            </a:r>
+          </a:p>
+        </p:txBody>
+      </p:sp>
+      <p:sp>
+        <p:nvSpPr>
+          <p:cNvPr id="31" name="TextBox 30"/>
+          <p:cNvSpPr txBox="1"/>
+          <p:nvPr/>
+        </p:nvSpPr>
+        <p:spPr>
+          <a:xfrm>
+            <a:off x="457200" y="5943600"/>
+            <a:ext cx="11247120" cy="457200"/>
+          </a:xfrm>
+          <a:prstGeom prst="rect">
+            <a:avLst/>
+          </a:prstGeom>
+          <a:noFill/>
+        </p:spPr>
+        <p:txBody>
+          <a:bodyPr wrap="square">
+            <a:spAutoFit/>
+          </a:bodyPr>
+          <a:lstStyle/>
+          <a:p>
+            <a:pPr algn="ctr"/>
+            <a:r>
+              <a:rPr sz="1500" b="1" i="1">
+                <a:solidFill>
+                  <a:srgbClr val="00D4AA"/>
+                </a:solidFill>
+                <a:latin typeface="Calibri"/>
+              </a:rPr>
+              <a:t>Une suite qu'on n'a jamais vue échouer n'apporte aucune preuve.</a:t>
+            </a:r>
+          </a:p>
+        </p:txBody>
+      </p:sp>
+    </p:spTree>
+  </p:cSld>
+  <p:clrMapOvr>
+    <a:masterClrMapping/>
+  </p:clrMapOvr>
+</p:sld>
+</file>
+
+<file path=ppt/slides/slide16.xml><?xml version="1.0" encoding="utf-8"?>
+<p:sld xmlns:a="http://schemas.openxmlformats.org/drawingml/2006/main" xmlns:p="http://schemas.openxmlformats.org/presentationml/2006/main" xmlns:r="http://schemas.openxmlformats.org/officeDocument/2006/relationships">
+  <p:cSld>
+    <p:bg>
+      <p:bgPr>
+        <a:solidFill>
+          <a:srgbClr val="0D1B2A"/>
+        </a:solidFill>
+        <a:effectLst/>
+      </p:bgPr>
+    </p:bg>
+    <p:spTree>
+      <p:nvGrpSpPr>
+        <p:cNvPr id="1" name=""/>
+        <p:cNvGrpSpPr/>
+        <p:nvPr/>
+      </p:nvGrpSpPr>
+      <p:grpSpPr/>
+      <p:sp>
+        <p:nvSpPr>
+          <p:cNvPr id="2" name="Rectangle 1"/>
+          <p:cNvSpPr/>
+          <p:nvPr/>
+        </p:nvSpPr>
+        <p:spPr>
+          <a:xfrm>
+            <a:off x="0" y="0"/>
             <a:ext cx="12188952" cy="1005840"/>
           </a:xfrm>
           <a:prstGeom prst="rect">
@@ -15104,8 +16237,8 @@
         </p:nvSpPr>
         <p:spPr>
           <a:xfrm>
-            <a:off x="457200" y="1280160"/>
-            <a:ext cx="5394960" cy="1005840"/>
+            <a:off x="457200" y="1234440"/>
+            <a:ext cx="5394960" cy="868680"/>
           </a:xfrm>
           <a:prstGeom prst="roundRect">
             <a:avLst>
@@ -15149,7 +16282,7 @@
         </p:nvSpPr>
         <p:spPr>
           <a:xfrm>
-            <a:off x="566928" y="1463040"/>
+            <a:off x="566928" y="1371600"/>
             <a:ext cx="594360" cy="594360"/>
           </a:xfrm>
           <a:prstGeom prst="roundRect">
@@ -15203,7 +16336,7 @@
         </p:nvSpPr>
         <p:spPr>
           <a:xfrm>
-            <a:off x="1280160" y="1527048"/>
+            <a:off x="1280160" y="1417320"/>
             <a:ext cx="4389120" cy="548640"/>
           </a:xfrm>
           <a:prstGeom prst="rect">
@@ -15219,7 +16352,7 @@
           <a:p>
             <a:pPr algn="l"/>
             <a:r>
-              <a:rPr sz="1700" b="1" i="0">
+              <a:rPr sz="1600" b="1" i="0">
                 <a:solidFill>
                   <a:srgbClr val="FFFFFF"/>
                 </a:solidFill>
@@ -15238,8 +16371,8 @@
         </p:nvSpPr>
         <p:spPr>
           <a:xfrm>
-            <a:off x="457200" y="2560320"/>
-            <a:ext cx="5394960" cy="1005840"/>
+            <a:off x="457200" y="2258568"/>
+            <a:ext cx="5394960" cy="868680"/>
           </a:xfrm>
           <a:prstGeom prst="roundRect">
             <a:avLst>
@@ -15283,7 +16416,7 @@
         </p:nvSpPr>
         <p:spPr>
           <a:xfrm>
-            <a:off x="566928" y="2743200"/>
+            <a:off x="566928" y="2395728"/>
             <a:ext cx="594360" cy="594360"/>
           </a:xfrm>
           <a:prstGeom prst="roundRect">
@@ -15337,7 +16470,7 @@
         </p:nvSpPr>
         <p:spPr>
           <a:xfrm>
-            <a:off x="1280160" y="2807208"/>
+            <a:off x="1280160" y="2441448"/>
             <a:ext cx="4389120" cy="548640"/>
           </a:xfrm>
           <a:prstGeom prst="rect">
@@ -15353,7 +16486,7 @@
           <a:p>
             <a:pPr algn="l"/>
             <a:r>
-              <a:rPr sz="1700" b="1" i="0">
+              <a:rPr sz="1600" b="1" i="0">
                 <a:solidFill>
                   <a:srgbClr val="FFFFFF"/>
                 </a:solidFill>
@@ -15372,8 +16505,8 @@
         </p:nvSpPr>
         <p:spPr>
           <a:xfrm>
-            <a:off x="457200" y="3840479"/>
-            <a:ext cx="5394960" cy="1005840"/>
+            <a:off x="457200" y="3282696"/>
+            <a:ext cx="5394960" cy="868680"/>
           </a:xfrm>
           <a:prstGeom prst="roundRect">
             <a:avLst>
@@ -15417,7 +16550,7 @@
         </p:nvSpPr>
         <p:spPr>
           <a:xfrm>
-            <a:off x="566928" y="4023359"/>
+            <a:off x="566928" y="3419856"/>
             <a:ext cx="594360" cy="594360"/>
           </a:xfrm>
           <a:prstGeom prst="roundRect">
@@ -15471,7 +16604,7 @@
         </p:nvSpPr>
         <p:spPr>
           <a:xfrm>
-            <a:off x="1280160" y="4087367"/>
+            <a:off x="1280160" y="3465576"/>
             <a:ext cx="4389120" cy="548640"/>
           </a:xfrm>
           <a:prstGeom prst="rect">
@@ -15487,7 +16620,7 @@
           <a:p>
             <a:pPr algn="l"/>
             <a:r>
-              <a:rPr sz="1700" b="1" i="0">
+              <a:rPr sz="1600" b="1" i="0">
                 <a:solidFill>
                   <a:srgbClr val="FFFFFF"/>
                 </a:solidFill>
@@ -15506,8 +16639,8 @@
         </p:nvSpPr>
         <p:spPr>
           <a:xfrm>
-            <a:off x="457200" y="5120640"/>
-            <a:ext cx="5394960" cy="1005840"/>
+            <a:off x="457200" y="4306824"/>
+            <a:ext cx="5394960" cy="868680"/>
           </a:xfrm>
           <a:prstGeom prst="roundRect">
             <a:avLst>
@@ -15551,7 +16684,7 @@
         </p:nvSpPr>
         <p:spPr>
           <a:xfrm>
-            <a:off x="566928" y="5303520"/>
+            <a:off x="566928" y="4443984"/>
             <a:ext cx="594360" cy="594360"/>
           </a:xfrm>
           <a:prstGeom prst="roundRect">
@@ -15605,7 +16738,7 @@
         </p:nvSpPr>
         <p:spPr>
           <a:xfrm>
-            <a:off x="1280160" y="5367528"/>
+            <a:off x="1280160" y="4489704"/>
             <a:ext cx="4389120" cy="548640"/>
           </a:xfrm>
           <a:prstGeom prst="rect">
@@ -15621,7 +16754,7 @@
           <a:p>
             <a:pPr algn="l"/>
             <a:r>
-              <a:rPr sz="1700" b="1" i="0">
+              <a:rPr sz="1600" b="1" i="0">
                 <a:solidFill>
                   <a:srgbClr val="FFFFFF"/>
                 </a:solidFill>
@@ -15640,8 +16773,8 @@
         </p:nvSpPr>
         <p:spPr>
           <a:xfrm>
-            <a:off x="6126480" y="1280160"/>
-            <a:ext cx="5394960" cy="1005840"/>
+            <a:off x="457200" y="5330952"/>
+            <a:ext cx="5394960" cy="868680"/>
           </a:xfrm>
           <a:prstGeom prst="roundRect">
             <a:avLst>
@@ -15685,7 +16818,7 @@
         </p:nvSpPr>
         <p:spPr>
           <a:xfrm>
-            <a:off x="6236208" y="1463040"/>
+            <a:off x="566928" y="5468112"/>
             <a:ext cx="594360" cy="594360"/>
           </a:xfrm>
           <a:prstGeom prst="roundRect">
@@ -15739,7 +16872,7 @@
         </p:nvSpPr>
         <p:spPr>
           <a:xfrm>
-            <a:off x="6949440" y="1527048"/>
+            <a:off x="1280160" y="5513832"/>
             <a:ext cx="4389120" cy="548640"/>
           </a:xfrm>
           <a:prstGeom prst="rect">
@@ -15755,7 +16888,7 @@
           <a:p>
             <a:pPr algn="l"/>
             <a:r>
-              <a:rPr sz="1700" b="1" i="0">
+              <a:rPr sz="1600" b="1" i="0">
                 <a:solidFill>
                   <a:srgbClr val="FFFFFF"/>
                 </a:solidFill>
@@ -15774,8 +16907,8 @@
         </p:nvSpPr>
         <p:spPr>
           <a:xfrm>
-            <a:off x="6126480" y="2560320"/>
-            <a:ext cx="5394960" cy="1005840"/>
+            <a:off x="6126480" y="1234440"/>
+            <a:ext cx="5394960" cy="868680"/>
           </a:xfrm>
           <a:prstGeom prst="roundRect">
             <a:avLst>
@@ -15819,7 +16952,7 @@
         </p:nvSpPr>
         <p:spPr>
           <a:xfrm>
-            <a:off x="6236208" y="2743200"/>
+            <a:off x="6236208" y="1371600"/>
             <a:ext cx="594360" cy="594360"/>
           </a:xfrm>
           <a:prstGeom prst="roundRect">
@@ -15873,7 +17006,7 @@
         </p:nvSpPr>
         <p:spPr>
           <a:xfrm>
-            <a:off x="6949440" y="2807208"/>
+            <a:off x="6949440" y="1417320"/>
             <a:ext cx="4389120" cy="548640"/>
           </a:xfrm>
           <a:prstGeom prst="rect">
@@ -15889,7 +17022,7 @@
           <a:p>
             <a:pPr algn="l"/>
             <a:r>
-              <a:rPr sz="1700" b="1" i="0">
+              <a:rPr sz="1600" b="1" i="0">
                 <a:solidFill>
                   <a:srgbClr val="FFFFFF"/>
                 </a:solidFill>
@@ -15908,8 +17041,8 @@
         </p:nvSpPr>
         <p:spPr>
           <a:xfrm>
-            <a:off x="6126480" y="3840479"/>
-            <a:ext cx="5394960" cy="1005840"/>
+            <a:off x="6126480" y="2258568"/>
+            <a:ext cx="5394960" cy="868680"/>
           </a:xfrm>
           <a:prstGeom prst="roundRect">
             <a:avLst>
@@ -15953,7 +17086,7 @@
         </p:nvSpPr>
         <p:spPr>
           <a:xfrm>
-            <a:off x="6236208" y="4023359"/>
+            <a:off x="6236208" y="2395728"/>
             <a:ext cx="594360" cy="594360"/>
           </a:xfrm>
           <a:prstGeom prst="roundRect">
@@ -16007,7 +17140,7 @@
         </p:nvSpPr>
         <p:spPr>
           <a:xfrm>
-            <a:off x="6949440" y="4087367"/>
+            <a:off x="6949440" y="2441448"/>
             <a:ext cx="4389120" cy="548640"/>
           </a:xfrm>
           <a:prstGeom prst="rect">
@@ -16023,7 +17156,7 @@
           <a:p>
             <a:pPr algn="l"/>
             <a:r>
-              <a:rPr sz="1700" b="1" i="0">
+              <a:rPr sz="1600" b="1" i="0">
                 <a:solidFill>
                   <a:srgbClr val="FFFFFF"/>
                 </a:solidFill>
@@ -16042,8 +17175,8 @@
         </p:nvSpPr>
         <p:spPr>
           <a:xfrm>
-            <a:off x="6126480" y="5120640"/>
-            <a:ext cx="5394960" cy="1005840"/>
+            <a:off x="6126480" y="3282696"/>
+            <a:ext cx="5394960" cy="868680"/>
           </a:xfrm>
           <a:prstGeom prst="roundRect">
             <a:avLst>
@@ -16087,7 +17220,7 @@
         </p:nvSpPr>
         <p:spPr>
           <a:xfrm>
-            <a:off x="6236208" y="5303520"/>
+            <a:off x="6236208" y="3419856"/>
             <a:ext cx="594360" cy="594360"/>
           </a:xfrm>
           <a:prstGeom prst="roundRect">
@@ -16141,7 +17274,7 @@
         </p:nvSpPr>
         <p:spPr>
           <a:xfrm>
-            <a:off x="6949440" y="5367528"/>
+            <a:off x="6949440" y="3465576"/>
             <a:ext cx="4389120" cy="548640"/>
           </a:xfrm>
           <a:prstGeom prst="rect">
@@ -16157,13 +17290,147 @@
           <a:p>
             <a:pPr algn="l"/>
             <a:r>
-              <a:rPr sz="1700" b="1" i="0">
+              <a:rPr sz="1600" b="1" i="0">
                 <a:solidFill>
                   <a:srgbClr val="FFFFFF"/>
                 </a:solidFill>
                 <a:latin typeface="Calibri"/>
               </a:rPr>
               <a:t>Règles de sécurité absolues</a:t>
+            </a:r>
+          </a:p>
+        </p:txBody>
+      </p:sp>
+      <p:sp>
+        <p:nvSpPr>
+          <p:cNvPr id="29" name="Rounded Rectangle 28"/>
+          <p:cNvSpPr/>
+          <p:nvPr/>
+        </p:nvSpPr>
+        <p:spPr>
+          <a:xfrm>
+            <a:off x="6126480" y="4306824"/>
+            <a:ext cx="5394960" cy="868680"/>
+          </a:xfrm>
+          <a:prstGeom prst="roundRect">
+            <a:avLst>
+              <a:gd name="adj" fmla="val 5000"/>
+            </a:avLst>
+          </a:prstGeom>
+          <a:solidFill>
+            <a:srgbClr val="1B2A3B"/>
+          </a:solidFill>
+          <a:ln>
+            <a:noFill/>
+          </a:ln>
+        </p:spPr>
+        <p:style>
+          <a:lnRef idx="1">
+            <a:schemeClr val="accent1"/>
+          </a:lnRef>
+          <a:fillRef idx="3">
+            <a:schemeClr val="accent1"/>
+          </a:fillRef>
+          <a:effectRef idx="2">
+            <a:schemeClr val="accent1"/>
+          </a:effectRef>
+          <a:fontRef idx="minor">
+            <a:schemeClr val="lt1"/>
+          </a:fontRef>
+        </p:style>
+        <p:txBody>
+          <a:bodyPr rtlCol="0" anchor="ctr"/>
+          <a:lstStyle/>
+          <a:p>
+            <a:pPr algn="ctr"/>
+          </a:p>
+        </p:txBody>
+      </p:sp>
+      <p:sp>
+        <p:nvSpPr>
+          <p:cNvPr id="30" name="Rounded Rectangle 29"/>
+          <p:cNvSpPr/>
+          <p:nvPr/>
+        </p:nvSpPr>
+        <p:spPr>
+          <a:xfrm>
+            <a:off x="6236208" y="4443984"/>
+            <a:ext cx="594360" cy="594360"/>
+          </a:xfrm>
+          <a:prstGeom prst="roundRect">
+            <a:avLst>
+              <a:gd name="adj" fmla="val 50000"/>
+            </a:avLst>
+          </a:prstGeom>
+          <a:solidFill>
+            <a:srgbClr val="00D4AA"/>
+          </a:solidFill>
+          <a:ln>
+            <a:noFill/>
+          </a:ln>
+        </p:spPr>
+        <p:style>
+          <a:lnRef idx="1">
+            <a:schemeClr val="accent1"/>
+          </a:lnRef>
+          <a:fillRef idx="3">
+            <a:schemeClr val="accent1"/>
+          </a:fillRef>
+          <a:effectRef idx="2">
+            <a:schemeClr val="accent1"/>
+          </a:effectRef>
+          <a:fontRef idx="minor">
+            <a:schemeClr val="lt1"/>
+          </a:fontRef>
+        </p:style>
+        <p:txBody>
+          <a:bodyPr rtlCol="0" anchor="ctr"/>
+          <a:lstStyle/>
+          <a:p>
+            <a:pPr algn="ctr"/>
+            <a:r>
+              <a:rPr sz="1400" b="1">
+                <a:solidFill>
+                  <a:srgbClr val="FFFFFF"/>
+                </a:solidFill>
+                <a:latin typeface="Calibri"/>
+              </a:rPr>
+              <a:t>09</a:t>
+            </a:r>
+          </a:p>
+        </p:txBody>
+      </p:sp>
+      <p:sp>
+        <p:nvSpPr>
+          <p:cNvPr id="31" name="TextBox 30"/>
+          <p:cNvSpPr txBox="1"/>
+          <p:nvPr/>
+        </p:nvSpPr>
+        <p:spPr>
+          <a:xfrm>
+            <a:off x="6949440" y="4489704"/>
+            <a:ext cx="4389120" cy="548640"/>
+          </a:xfrm>
+          <a:prstGeom prst="rect">
+            <a:avLst/>
+          </a:prstGeom>
+          <a:noFill/>
+        </p:spPr>
+        <p:txBody>
+          <a:bodyPr wrap="square">
+            <a:spAutoFit/>
+          </a:bodyPr>
+          <a:lstStyle/>
+          <a:p>
+            <a:pPr algn="l"/>
+            <a:r>
+              <a:rPr sz="1600" b="1" i="0">
+                <a:solidFill>
+                  <a:srgbClr val="FFFFFF"/>
+                </a:solidFill>
+                <a:latin typeface="Calibri"/>
+              </a:rPr>
+              <a:t>Exploitation &amp; assurance qualité</a:t>
             </a:r>
           </a:p>
         </p:txBody>

--- a/AI_Transit_Pipeline_Slides.pptx
+++ b/AI_Transit_Pipeline_Slides.pptx
@@ -14470,7 +14470,7 @@
                 </a:solidFill>
                 <a:latin typeface="Calibri"/>
               </a:rPr>
-              <a:t>51 assertions, aucun outil requis</a:t>
+              <a:t>69 assertions, aucun outil requis</a:t>
             </a:r>
           </a:p>
         </p:txBody>
@@ -14798,8 +14798,8 @@
         </p:nvSpPr>
         <p:spPr>
           <a:xfrm>
-            <a:off x="457200" y="4983480"/>
-            <a:ext cx="11247120" cy="822960"/>
+            <a:off x="457200" y="4892040"/>
+            <a:ext cx="11247120" cy="1280160"/>
           </a:xfrm>
           <a:prstGeom prst="rect">
             <a:avLst/>
@@ -14818,7 +14818,7 @@
               </a:spcAft>
             </a:pPr>
             <a:r>
-              <a:rPr sz="1200" b="0">
+              <a:rPr sz="1150" b="0">
                 <a:solidFill>
                   <a:srgbClr val="8899AA"/>
                 </a:solidFill>
@@ -14834,7 +14834,7 @@
               </a:spcAft>
             </a:pPr>
             <a:r>
-              <a:rPr sz="1200" b="0">
+              <a:rPr sz="1150" b="0">
                 <a:solidFill>
                   <a:srgbClr val="8899AA"/>
                 </a:solidFill>
@@ -14843,6 +14843,38 @@
               <a:t>.transit-allow.json  —  rétrograde un FAIL connu en WARN, avec justification</a:t>
             </a:r>
           </a:p>
+          <a:p>
+            <a:pPr algn="l">
+              <a:spcAft>
+                <a:spcPts val="400"/>
+              </a:spcAft>
+            </a:pPr>
+            <a:r>
+              <a:rPr sz="1150" b="0">
+                <a:solidFill>
+                  <a:srgbClr val="8899AA"/>
+                </a:solidFill>
+                <a:latin typeface="Calibri"/>
+              </a:rPr>
+              <a:t>--offline  —  environnement isolé : règles et bases pré-positionnées ; le bloc coverage</a:t>
+            </a:r>
+          </a:p>
+          <a:p>
+            <a:pPr algn="l">
+              <a:spcAft>
+                <a:spcPts val="400"/>
+              </a:spcAft>
+            </a:pPr>
+            <a:r>
+              <a:rPr sz="1150" b="0">
+                <a:solidFill>
+                  <a:srgbClr val="8899AA"/>
+                </a:solidFill>
+                <a:latin typeface="Calibri"/>
+              </a:rPr>
+              <a:t>                indique, couche par couche, si elle a réellement été exécutée</a:t>
+            </a:r>
+          </a:p>
         </p:txBody>
       </p:sp>
       <p:sp>
@@ -14853,7 +14885,7 @@
         </p:nvSpPr>
         <p:spPr>
           <a:xfrm>
-            <a:off x="457200" y="5943600"/>
+            <a:off x="457200" y="6172200"/>
             <a:ext cx="11247120" cy="457200"/>
           </a:xfrm>
           <a:prstGeom prst="rect">

--- a/AI_Transit_Pipeline_Slides.pptx
+++ b/AI_Transit_Pipeline_Slides.pptx
@@ -14470,7 +14470,7 @@
                 </a:solidFill>
                 <a:latin typeface="Calibri"/>
               </a:rPr>
-              <a:t>69 assertions, aucun outil requis</a:t>
+              <a:t>70 assertions, aucun outil requis</a:t>
             </a:r>
           </a:p>
         </p:txBody>
